--- a/media/resources/files/Onduktar_Akcha_Bingo.pptx
+++ b/media/resources/files/Onduktar_Akcha_Bingo.pptx
@@ -21454,7 +21454,7 @@
             </a:pPr>
             <a:r>
               <a:rPr lang="ru-RU" dirty="0"/>
-              <a:t>Турдуу пикирлер учун ыраазычылык билдиребиз.</a:t>
+              <a:t>Түрдүү пикирлер үчүн ыраазычылык билдиребиз.</a:t>
             </a:r>
           </a:p>
           <a:p>

--- a/media/resources/files/Onduktar_Akcha_Bingo.pptx
+++ b/media/resources/files/Onduktar_Akcha_Bingo.pptx
@@ -3762,7 +3762,7 @@
                 <a:ea typeface="+mn-ea"/>
                 <a:cs typeface="+mn-cs"/>
               </a:rPr>
-              <a:t>Окуучулар </a:t>
+              <a:t>Окуучулар тордон тогуз жоопту тандап, дептердеги 3х3 чакмакка каалагандай коюшат.</a:t>
             </a:r>
             <a:r>
               <a:rPr kumimoji="0" lang="ru-RU" sz="2000" b="0" i="0" u="none" strike="noStrike" kern="1200" cap="none" spc="0" normalizeH="0" baseline="0" noProof="0" dirty="0">
@@ -3779,7 +3779,7 @@
                 <a:ea typeface="+mn-ea"/>
                 <a:cs typeface="+mn-cs"/>
               </a:rPr>
-              <a:t>суроо</a:t>
+              <a:t/>
             </a:r>
             <a:r>
               <a:rPr kumimoji="0" lang="en-US" sz="2000" b="0" i="0" u="none" strike="noStrike" kern="1200" cap="none" spc="0" normalizeH="0" baseline="0" noProof="0" dirty="0">
@@ -3796,7 +3796,7 @@
                 <a:ea typeface="+mn-ea"/>
                 <a:cs typeface="+mn-cs"/>
               </a:rPr>
-              <a:t> </a:t>
+              <a:t/>
             </a:r>
             <a:r>
               <a:rPr kumimoji="0" lang="en-US" sz="2000" b="0" i="0" u="none" strike="noStrike" kern="1200" cap="none" spc="0" normalizeH="0" baseline="0" noProof="0" dirty="0" err="1">
@@ -3813,7 +3813,7 @@
                 <a:ea typeface="+mn-ea"/>
                 <a:cs typeface="+mn-cs"/>
               </a:rPr>
-              <a:t>тордон</a:t>
+              <a:t/>
             </a:r>
             <a:r>
               <a:rPr kumimoji="0" lang="en-US" sz="2000" b="0" i="0" u="none" strike="noStrike" kern="1200" cap="none" spc="0" normalizeH="0" baseline="0" noProof="0" dirty="0">
@@ -3830,7 +3830,7 @@
                 <a:ea typeface="+mn-ea"/>
                 <a:cs typeface="+mn-cs"/>
               </a:rPr>
-              <a:t> </a:t>
+              <a:t/>
             </a:r>
             <a:r>
               <a:rPr kumimoji="0" lang="en-US" sz="1800" b="0" i="0" u="none" strike="noStrike" kern="1200" cap="none" spc="0" normalizeH="0" baseline="0" noProof="0" dirty="0" err="1">
@@ -3847,7 +3847,7 @@
                 <a:ea typeface="+mn-ea"/>
                 <a:cs typeface="+mn-cs"/>
               </a:rPr>
-              <a:t>тогуз</a:t>
+              <a:t/>
             </a:r>
             <a:r>
               <a:rPr kumimoji="0" lang="en-US" sz="1800" b="0" i="0" u="none" strike="noStrike" kern="1200" cap="none" spc="0" normalizeH="0" baseline="0" noProof="0" dirty="0">
@@ -3864,7 +3864,7 @@
                 <a:ea typeface="+mn-ea"/>
                 <a:cs typeface="+mn-cs"/>
               </a:rPr>
-              <a:t> </a:t>
+              <a:t/>
             </a:r>
             <a:r>
               <a:rPr kumimoji="0" lang="en-US" sz="1800" b="0" i="0" u="none" strike="noStrike" kern="1200" cap="none" spc="0" normalizeH="0" baseline="0" noProof="0" dirty="0" err="1">
@@ -3881,7 +3881,7 @@
                 <a:ea typeface="+mn-ea"/>
                 <a:cs typeface="+mn-cs"/>
               </a:rPr>
-              <a:t>жоопту</a:t>
+              <a:t/>
             </a:r>
             <a:r>
               <a:rPr kumimoji="0" lang="en-US" sz="1800" b="0" i="0" u="none" strike="noStrike" kern="1200" cap="none" spc="0" normalizeH="0" baseline="0" noProof="0" dirty="0">
@@ -3898,7 +3898,7 @@
                 <a:ea typeface="+mn-ea"/>
                 <a:cs typeface="+mn-cs"/>
               </a:rPr>
-              <a:t> </a:t>
+              <a:t/>
             </a:r>
             <a:r>
               <a:rPr kumimoji="0" lang="en-US" sz="1800" b="0" i="0" u="none" strike="noStrike" kern="1200" cap="none" spc="0" normalizeH="0" baseline="0" noProof="0" dirty="0" err="1">
@@ -3915,7 +3915,7 @@
                 <a:ea typeface="+mn-ea"/>
                 <a:cs typeface="+mn-cs"/>
               </a:rPr>
-              <a:t>тандап</a:t>
+              <a:t/>
             </a:r>
             <a:r>
               <a:rPr kumimoji="0" lang="en-US" sz="1800" b="0" i="0" u="none" strike="noStrike" kern="1200" cap="none" spc="0" normalizeH="0" baseline="0" noProof="0" dirty="0">
@@ -3932,7 +3932,7 @@
                 <a:ea typeface="+mn-ea"/>
                 <a:cs typeface="+mn-cs"/>
               </a:rPr>
-              <a:t>, </a:t>
+              <a:t/>
             </a:r>
             <a:r>
               <a:rPr kumimoji="0" lang="en-US" sz="1800" b="0" i="0" u="none" strike="noStrike" kern="1200" cap="none" spc="0" normalizeH="0" baseline="0" noProof="0" dirty="0" err="1">
@@ -3949,7 +3949,7 @@
                 <a:ea typeface="+mn-ea"/>
                 <a:cs typeface="+mn-cs"/>
               </a:rPr>
-              <a:t>аларды</a:t>
+              <a:t/>
             </a:r>
             <a:r>
               <a:rPr kumimoji="0" lang="en-US" sz="1800" b="0" i="0" u="none" strike="noStrike" kern="1200" cap="none" spc="0" normalizeH="0" baseline="0" noProof="0" dirty="0">
@@ -3966,7 +3966,7 @@
                 <a:ea typeface="+mn-ea"/>
                 <a:cs typeface="+mn-cs"/>
               </a:rPr>
-              <a:t> </a:t>
+              <a:t/>
             </a:r>
             <a:r>
               <a:rPr kumimoji="0" lang="ru-RU" sz="1800" b="0" i="0" u="none" strike="noStrike" kern="1200" cap="none" spc="0" normalizeH="0" baseline="0" noProof="0" dirty="0">
@@ -3983,7 +3983,7 @@
                 <a:ea typeface="+mn-ea"/>
                 <a:cs typeface="+mn-cs"/>
               </a:rPr>
-              <a:t>дептериндеги</a:t>
+              <a:t/>
             </a:r>
             <a:r>
               <a:rPr kumimoji="0" lang="en-US" sz="1800" b="0" i="0" u="none" strike="noStrike" kern="1200" cap="none" spc="0" normalizeH="0" baseline="0" noProof="0" dirty="0">
@@ -4000,7 +4000,7 @@
                 <a:ea typeface="+mn-ea"/>
                 <a:cs typeface="+mn-cs"/>
               </a:rPr>
-              <a:t> 3х3 </a:t>
+              <a:t/>
             </a:r>
             <a:r>
               <a:rPr kumimoji="0" lang="en-US" sz="1800" b="0" i="0" u="none" strike="noStrike" kern="1200" cap="none" spc="0" normalizeH="0" baseline="0" noProof="0" dirty="0" err="1">
@@ -4017,7 +4017,7 @@
                 <a:ea typeface="+mn-ea"/>
                 <a:cs typeface="+mn-cs"/>
               </a:rPr>
-              <a:t>квадратка</a:t>
+              <a:t/>
             </a:r>
             <a:r>
               <a:rPr kumimoji="0" lang="en-US" sz="1800" b="0" i="0" u="none" strike="noStrike" kern="1200" cap="none" spc="0" normalizeH="0" baseline="0" noProof="0" dirty="0">
@@ -4034,7 +4034,7 @@
                 <a:ea typeface="+mn-ea"/>
                 <a:cs typeface="+mn-cs"/>
               </a:rPr>
-              <a:t> </a:t>
+              <a:t/>
             </a:r>
             <a:r>
               <a:rPr kumimoji="0" lang="en-US" sz="1800" b="0" i="0" u="none" strike="noStrike" kern="1200" cap="none" spc="0" normalizeH="0" baseline="0" noProof="0" dirty="0" err="1">
@@ -4051,7 +4051,7 @@
                 <a:ea typeface="+mn-ea"/>
                 <a:cs typeface="+mn-cs"/>
               </a:rPr>
-              <a:t>туш</a:t>
+              <a:t/>
             </a:r>
             <a:r>
               <a:rPr kumimoji="0" lang="en-US" sz="1800" b="0" i="0" u="none" strike="noStrike" kern="1200" cap="none" spc="0" normalizeH="0" baseline="0" noProof="0" dirty="0">
@@ -4068,7 +4068,7 @@
                 <a:ea typeface="+mn-ea"/>
                 <a:cs typeface="+mn-cs"/>
               </a:rPr>
-              <a:t> </a:t>
+              <a:t/>
             </a:r>
             <a:r>
               <a:rPr kumimoji="0" lang="en-US" sz="1800" b="0" i="0" u="none" strike="noStrike" kern="1200" cap="none" spc="0" normalizeH="0" baseline="0" noProof="0" dirty="0" err="1">
@@ -4085,7 +4085,7 @@
                 <a:ea typeface="+mn-ea"/>
                 <a:cs typeface="+mn-cs"/>
               </a:rPr>
-              <a:t>келди</a:t>
+              <a:t/>
             </a:r>
             <a:r>
               <a:rPr kumimoji="0" lang="en-US" sz="1800" b="0" i="0" u="none" strike="noStrike" kern="1200" cap="none" spc="0" normalizeH="0" baseline="0" noProof="0" dirty="0">
@@ -4102,7 +4102,7 @@
                 <a:ea typeface="+mn-ea"/>
                 <a:cs typeface="+mn-cs"/>
               </a:rPr>
-              <a:t> </a:t>
+              <a:t/>
             </a:r>
             <a:r>
               <a:rPr kumimoji="0" lang="en-US" sz="1800" b="0" i="0" u="none" strike="noStrike" kern="1200" cap="none" spc="0" normalizeH="0" baseline="0" noProof="0" dirty="0" err="1">
@@ -4119,7 +4119,7 @@
                 <a:ea typeface="+mn-ea"/>
                 <a:cs typeface="+mn-cs"/>
               </a:rPr>
-              <a:t>жайгаштырышы</a:t>
+              <a:t/>
             </a:r>
             <a:r>
               <a:rPr kumimoji="0" lang="en-US" sz="1800" b="0" i="0" u="none" strike="noStrike" kern="1200" cap="none" spc="0" normalizeH="0" baseline="0" noProof="0" dirty="0">
@@ -4136,7 +4136,7 @@
                 <a:ea typeface="+mn-ea"/>
                 <a:cs typeface="+mn-cs"/>
               </a:rPr>
-              <a:t> </a:t>
+              <a:t/>
             </a:r>
             <a:r>
               <a:rPr kumimoji="0" lang="en-US" sz="1800" b="0" i="0" u="none" strike="noStrike" kern="1200" cap="none" spc="0" normalizeH="0" baseline="0" noProof="0" dirty="0" err="1">
@@ -4153,7 +4153,7 @@
                 <a:ea typeface="+mn-ea"/>
                 <a:cs typeface="+mn-cs"/>
               </a:rPr>
-              <a:t>керек</a:t>
+              <a:t/>
             </a:r>
             <a:r>
               <a:rPr kumimoji="0" lang="en-US" sz="1800" b="0" i="0" u="none" strike="noStrike" kern="1200" cap="none" spc="0" normalizeH="0" baseline="0" noProof="0" dirty="0">
@@ -4170,7 +4170,7 @@
                 <a:ea typeface="+mn-ea"/>
                 <a:cs typeface="+mn-cs"/>
               </a:rPr>
-              <a:t>.</a:t>
+              <a:t/>
             </a:r>
           </a:p>
           <a:p>
@@ -5655,7 +5655,7 @@
             <a:pPr algn="ctr"/>
             <a:r>
               <a:rPr lang="ky-KG" sz="4400" dirty="0"/>
-              <a:t>10642.26 сом</a:t>
+              <a:t>10642,26 сом</a:t>
             </a:r>
             <a:endParaRPr lang="en-GB" sz="4400" dirty="0"/>
           </a:p>
@@ -5848,7 +5848,7 @@
                   <a:schemeClr val="tx1"/>
                 </a:solidFill>
               </a:rPr>
-              <a:t>2660.72</a:t>
+              <a:t>2660,72</a:t>
             </a:r>
             <a:r>
               <a:rPr lang="ky-KG" sz="4400" dirty="0">
@@ -6331,7 +6331,7 @@
                   <a:schemeClr val="tx1"/>
                 </a:solidFill>
               </a:rPr>
-              <a:t>64.39 с</a:t>
+              <a:t>64,39 с</a:t>
             </a:r>
             <a:endParaRPr lang="en-GB" sz="4400" dirty="0">
               <a:solidFill>
@@ -6372,7 +6372,7 @@
             <a:pPr algn="ctr"/>
             <a:r>
               <a:rPr lang="en-GB" sz="4400" dirty="0"/>
-              <a:t>965.85</a:t>
+              <a:t>965,85</a:t>
             </a:r>
             <a:r>
               <a:rPr lang="ky-KG" sz="4400" dirty="0"/>
@@ -6768,7 +6768,7 @@
             <a:pPr algn="ctr"/>
             <a:r>
               <a:rPr lang="ru-RU" sz="2800" dirty="0"/>
-              <a:t>10 даананын баасына ,</a:t>
+              <a:t>10 даананын баасына,</a:t>
             </a:r>
           </a:p>
           <a:p>
@@ -6954,7 +6954,7 @@
                 </a:solidFill>
                 <a:latin typeface="Open Sans" panose="020B0606030504020204" pitchFamily="34" charset="0"/>
               </a:rPr>
-              <a:t>.</a:t>
+              <a:t>,</a:t>
             </a:r>
             <a:r>
               <a:rPr lang="en-US" sz="4400" b="1" i="0" dirty="0">
@@ -7025,7 +7025,7 @@
             <a:pPr algn="ctr"/>
             <a:r>
               <a:rPr lang="ky-KG" sz="4400" dirty="0"/>
-              <a:t>1737.5 сом</a:t>
+              <a:t>1737,5 сом</a:t>
             </a:r>
             <a:endParaRPr lang="en-GB" sz="4400" dirty="0"/>
           </a:p>
@@ -7568,7 +7568,7 @@
             <a:pPr algn="ctr"/>
             <a:r>
               <a:rPr lang="en-GB" sz="4400" dirty="0"/>
-              <a:t>1364.1</a:t>
+              <a:t>1364,1</a:t>
             </a:r>
             <a:r>
               <a:rPr lang="ky-KG" sz="4400" dirty="0"/>
@@ -7766,7 +7766,7 @@
                   <a:schemeClr val="tx1"/>
                 </a:solidFill>
               </a:rPr>
-              <a:t>45.47</a:t>
+              <a:t>45,47</a:t>
             </a:r>
             <a:r>
               <a:rPr lang="ky-KG" sz="4400" dirty="0">
@@ -8189,7 +8189,7 @@
             <a:pPr algn="ctr"/>
             <a:r>
               <a:rPr lang="ky-KG" sz="4400" dirty="0"/>
-              <a:t>913.57 сом</a:t>
+              <a:t>913,57 сом</a:t>
             </a:r>
             <a:endParaRPr lang="en-GB" sz="4400" dirty="0"/>
           </a:p>
@@ -8377,7 +8377,7 @@
                   <a:schemeClr val="tx1"/>
                 </a:solidFill>
               </a:rPr>
-              <a:t>130.51</a:t>
+              <a:t>130,51</a:t>
             </a:r>
             <a:r>
               <a:rPr lang="ky-KG" sz="4400" dirty="0">
@@ -8646,7 +8646,7 @@
             </a:r>
             <a:r>
               <a:rPr lang="en-GB" sz="4400" dirty="0"/>
-              <a:t>836.54</a:t>
+              <a:t>836,54</a:t>
             </a:r>
             <a:r>
               <a:rPr lang="ky-KG" sz="4400" dirty="0"/>
@@ -9027,7 +9027,7 @@
                   <a:schemeClr val="tx1"/>
                 </a:solidFill>
               </a:rPr>
-              <a:t>1970.28</a:t>
+              <a:t>1970,28</a:t>
             </a:r>
             <a:r>
               <a:rPr lang="ky-KG" sz="4400" dirty="0">
@@ -9478,7 +9478,7 @@
                   <a:schemeClr val="tx1"/>
                 </a:solidFill>
               </a:rPr>
-              <a:t>17.68</a:t>
+              <a:t>17,68</a:t>
             </a:r>
             <a:r>
               <a:rPr lang="ky-KG" sz="4400" dirty="0">
@@ -9527,7 +9527,7 @@
             <a:pPr algn="ctr"/>
             <a:r>
               <a:rPr lang="en-GB" sz="4400" dirty="0"/>
-              <a:t>2121.6</a:t>
+              <a:t>2121,6</a:t>
             </a:r>
             <a:r>
               <a:rPr lang="ky-KG" sz="4400" dirty="0"/>
@@ -10063,7 +10063,7 @@
             <a:pPr algn="ctr"/>
             <a:r>
               <a:rPr lang="en-GB" sz="4400" dirty="0"/>
-              <a:t>41676.8 </a:t>
+              <a:t>41676,8 </a:t>
             </a:r>
             <a:r>
               <a:rPr lang="ky-KG" sz="4400" dirty="0"/>
@@ -10261,7 +10261,7 @@
                   <a:schemeClr val="tx1"/>
                 </a:solidFill>
               </a:rPr>
-              <a:t>2315.50</a:t>
+              <a:t>2315,50</a:t>
             </a:r>
             <a:r>
               <a:rPr lang="ky-KG" sz="4400" dirty="0">
@@ -10727,7 +10727,7 @@
                   <a:schemeClr val="tx1"/>
                 </a:solidFill>
               </a:rPr>
-              <a:t>6.18</a:t>
+              <a:t>6,18</a:t>
             </a:r>
             <a:r>
               <a:rPr lang="ky-KG" sz="4400" dirty="0">
@@ -10776,7 +10776,7 @@
             <a:pPr algn="ctr"/>
             <a:r>
               <a:rPr lang="en-GB" sz="4400" dirty="0"/>
-              <a:t>883.26</a:t>
+              <a:t>883,26</a:t>
             </a:r>
             <a:r>
               <a:rPr lang="ky-KG" sz="4400" dirty="0"/>
@@ -11323,7 +11323,7 @@
             </a:r>
             <a:r>
               <a:rPr lang="en-GB" sz="4400" dirty="0"/>
-              <a:t>727.08</a:t>
+              <a:t>727,08</a:t>
             </a:r>
             <a:r>
               <a:rPr lang="ky-KG" sz="4400" dirty="0"/>
@@ -11521,7 +11521,7 @@
                   <a:schemeClr val="tx1"/>
                 </a:solidFill>
               </a:rPr>
-              <a:t>1532.44</a:t>
+              <a:t>1532,44</a:t>
             </a:r>
             <a:r>
               <a:rPr lang="ky-KG" sz="4400" dirty="0">
@@ -21606,7 +21606,7 @@
                             <a:schemeClr val="tx1"/>
                           </a:solidFill>
                         </a:rPr>
-                        <a:t>10642.26</a:t>
+                        <a:t>10642,26</a:t>
                       </a:r>
                       <a:endParaRPr kumimoji="0" lang="en-GB" sz="4000" b="0" i="0" u="none" strike="noStrike" kern="1200" cap="none" spc="0" normalizeH="0" baseline="0" noProof="0" dirty="0">
                         <a:ln>
@@ -21694,7 +21694,7 @@
                             <a:schemeClr val="tx1"/>
                           </a:solidFill>
                         </a:rPr>
-                        <a:t>583.55</a:t>
+                        <a:t>583,55</a:t>
                       </a:r>
                       <a:endParaRPr kumimoji="0" lang="en-GB" sz="4000" b="0" i="0" u="none" strike="noStrike" kern="1200" cap="none" spc="0" normalizeH="0" baseline="0" noProof="0" dirty="0">
                         <a:ln>
@@ -21798,7 +21798,7 @@
                             <a:schemeClr val="tx1"/>
                           </a:solidFill>
                         </a:rPr>
-                        <a:t>727.08</a:t>
+                        <a:t>727,08</a:t>
                       </a:r>
                       <a:r>
                         <a:rPr lang="ky-KG" sz="4000" b="0" dirty="0">
@@ -21894,7 +21894,7 @@
                             <a:schemeClr val="tx1"/>
                           </a:solidFill>
                         </a:rPr>
-                        <a:t>3022.8</a:t>
+                        <a:t>3022,8</a:t>
                       </a:r>
                       <a:endParaRPr kumimoji="0" lang="en-GB" sz="4000" b="0" i="0" u="none" strike="noStrike" kern="1200" cap="none" spc="0" normalizeH="0" baseline="0" noProof="0" dirty="0">
                         <a:ln>
@@ -21985,7 +21985,7 @@
                       </a:pPr>
                       <a:r>
                         <a:rPr lang="en-GB" sz="4000" dirty="0"/>
-                        <a:t>2121.6</a:t>
+                        <a:t>2121,6</a:t>
                       </a:r>
                     </a:p>
                   </a:txBody>
@@ -22055,7 +22055,7 @@
                       </a:pPr>
                       <a:r>
                         <a:rPr lang="en-GB" sz="4000" dirty="0"/>
-                        <a:t>1364.1</a:t>
+                        <a:t>1364,1</a:t>
                       </a:r>
                     </a:p>
                   </a:txBody>
@@ -22133,7 +22133,7 @@
                       </a:r>
                       <a:r>
                         <a:rPr lang="en-GB" sz="4000" dirty="0"/>
-                        <a:t>836.54</a:t>
+                        <a:t>836,54</a:t>
                       </a:r>
                       <a:r>
                         <a:rPr lang="ky-KG" sz="4000" dirty="0"/>
@@ -22208,7 +22208,7 @@
                       </a:pPr>
                       <a:r>
                         <a:rPr lang="en-GB" sz="4000" dirty="0"/>
-                        <a:t>965.85</a:t>
+                        <a:t>965,85</a:t>
                       </a:r>
                     </a:p>
                   </a:txBody>
@@ -22285,7 +22285,7 @@
                       </a:pPr>
                       <a:r>
                         <a:rPr lang="ky-KG" sz="4000" dirty="0"/>
-                        <a:t>172.2</a:t>
+                        <a:t>172,2</a:t>
                       </a:r>
                       <a:endParaRPr kumimoji="0" lang="en-GB" sz="4000" b="0" i="0" u="none" strike="noStrike" kern="1200" cap="none" spc="0" normalizeH="0" baseline="0" noProof="0" dirty="0">
                         <a:ln>
@@ -22369,7 +22369,7 @@
                       </a:pPr>
                       <a:r>
                         <a:rPr lang="en-GB" sz="4000" dirty="0"/>
-                        <a:t>883.26</a:t>
+                        <a:t>883,26</a:t>
                       </a:r>
                       <a:endParaRPr kumimoji="0" lang="en-GB" sz="4000" b="0" i="0" u="none" strike="noStrike" kern="1200" cap="none" spc="0" normalizeH="0" baseline="0" noProof="0" dirty="0">
                         <a:ln>
@@ -22453,7 +22453,7 @@
                       </a:pPr>
                       <a:r>
                         <a:rPr lang="ky-KG" sz="4000" dirty="0"/>
-                        <a:t>445.80</a:t>
+                        <a:t>445,80</a:t>
                       </a:r>
                       <a:endParaRPr kumimoji="0" lang="en-GB" sz="4000" b="0" i="0" u="none" strike="noStrike" kern="1200" cap="none" spc="0" normalizeH="0" baseline="0" noProof="0" dirty="0">
                         <a:ln>
@@ -22537,7 +22537,7 @@
                       </a:pPr>
                       <a:r>
                         <a:rPr lang="en-GB" sz="4000" dirty="0"/>
-                        <a:t>41676.8</a:t>
+                        <a:t>41676,8</a:t>
                       </a:r>
                       <a:endParaRPr kumimoji="0" lang="en-GB" sz="4000" b="0" i="0" u="none" strike="noStrike" kern="1200" cap="none" spc="0" normalizeH="0" baseline="0" noProof="0" dirty="0">
                         <a:ln>
@@ -22628,7 +22628,7 @@
                       </a:pPr>
                       <a:r>
                         <a:rPr lang="en-GB" sz="4000" dirty="0"/>
-                        <a:t>9,051.5</a:t>
+                        <a:t>9 051,5</a:t>
                       </a:r>
                       <a:r>
                         <a:rPr lang="ky-KG" sz="4000" dirty="0"/>
@@ -22703,7 +22703,7 @@
                       </a:pPr>
                       <a:r>
                         <a:rPr lang="ky-KG" sz="4000" dirty="0"/>
-                        <a:t>913.57</a:t>
+                        <a:t>913,57</a:t>
                       </a:r>
                       <a:endParaRPr lang="en-GB" sz="4000" dirty="0"/>
                     </a:p>
@@ -22774,7 +22774,7 @@
                       </a:pPr>
                       <a:r>
                         <a:rPr lang="ky-KG" sz="4000" dirty="0"/>
-                        <a:t>1737.5</a:t>
+                        <a:t>1737,5</a:t>
                       </a:r>
                       <a:endParaRPr lang="en-GB" sz="4000" dirty="0"/>
                     </a:p>
@@ -22845,7 +22845,7 @@
                       </a:pPr>
                       <a:r>
                         <a:rPr lang="ky-KG" sz="4000" dirty="0"/>
-                        <a:t>171.78</a:t>
+                        <a:t>171,78</a:t>
                       </a:r>
                       <a:endParaRPr lang="en-GB" sz="4000" dirty="0"/>
                     </a:p>
@@ -24064,7 +24064,7 @@
             <a:pPr algn="ctr"/>
             <a:r>
               <a:rPr lang="ky-KG" sz="4400" dirty="0"/>
-              <a:t>445.80 сом</a:t>
+              <a:t>445,80 сом</a:t>
             </a:r>
             <a:endParaRPr lang="en-GB" sz="4400" dirty="0"/>
           </a:p>
@@ -24266,7 +24266,7 @@
                   <a:schemeClr val="tx1"/>
                 </a:solidFill>
               </a:rPr>
-              <a:t>4.30сом</a:t>
+              <a:t>4,30сом</a:t>
             </a:r>
             <a:endParaRPr lang="en-GB" sz="4400" dirty="0">
               <a:solidFill>
@@ -24709,7 +24709,7 @@
                   <a:schemeClr val="tx1"/>
                 </a:solidFill>
               </a:rPr>
-              <a:t>12.30 </a:t>
+              <a:t>12,30 </a:t>
             </a:r>
             <a:r>
               <a:rPr lang="ky-KG" sz="4400" dirty="0">
@@ -24758,7 +24758,7 @@
             <a:pPr algn="ctr"/>
             <a:r>
               <a:rPr lang="ky-KG" sz="4400" dirty="0"/>
-              <a:t>172.2 сом</a:t>
+              <a:t>172,2 сом</a:t>
             </a:r>
             <a:endParaRPr lang="en-GB" sz="4400" dirty="0"/>
           </a:p>
@@ -25291,7 +25291,7 @@
             <a:pPr algn="ctr"/>
             <a:r>
               <a:rPr lang="en-GB" sz="4400" dirty="0"/>
-              <a:t>3022.8</a:t>
+              <a:t>3022,8</a:t>
             </a:r>
             <a:r>
               <a:rPr lang="ky-KG" sz="4400" dirty="0"/>
@@ -25573,7 +25573,7 @@
                   <a:schemeClr val="tx1"/>
                 </a:solidFill>
               </a:rPr>
-              <a:t>604.56</a:t>
+              <a:t>604,56</a:t>
             </a:r>
           </a:p>
         </p:txBody>
@@ -26062,7 +26062,7 @@
                   <a:schemeClr val="tx1"/>
                 </a:solidFill>
               </a:rPr>
-              <a:t>1810.30</a:t>
+              <a:t>1810,30</a:t>
             </a:r>
             <a:r>
               <a:rPr lang="ky-KG" sz="4400" dirty="0">
@@ -26111,7 +26111,7 @@
             <a:pPr algn="ctr"/>
             <a:r>
               <a:rPr lang="en-GB" sz="4400" dirty="0"/>
-              <a:t>9,051.5</a:t>
+              <a:t>9 051,5</a:t>
             </a:r>
             <a:r>
               <a:rPr lang="ky-KG" sz="4400" dirty="0"/>
@@ -26647,7 +26647,7 @@
                   <a:schemeClr val="tx1"/>
                 </a:solidFill>
               </a:rPr>
-              <a:t>53.05</a:t>
+              <a:t>53,05</a:t>
             </a:r>
             <a:r>
               <a:rPr lang="ky-KG" sz="4400" dirty="0">
@@ -26696,7 +26696,7 @@
             <a:pPr algn="ctr"/>
             <a:r>
               <a:rPr lang="en-GB" sz="4400" dirty="0"/>
-              <a:t>583.55</a:t>
+              <a:t>583,55</a:t>
             </a:r>
             <a:r>
               <a:rPr lang="ky-KG" sz="4400" dirty="0"/>
@@ -27225,7 +27225,7 @@
             <a:pPr algn="ctr"/>
             <a:r>
               <a:rPr lang="ky-KG" sz="4400" dirty="0"/>
-              <a:t>171.78 сом</a:t>
+              <a:t>171,78 сом</a:t>
             </a:r>
             <a:endParaRPr lang="en-GB" sz="4400" dirty="0"/>
           </a:p>
@@ -27419,7 +27419,7 @@
                   <a:schemeClr val="tx1"/>
                 </a:solidFill>
               </a:rPr>
-              <a:t>28.63</a:t>
+              <a:t>28,63</a:t>
             </a:r>
             <a:r>
               <a:rPr lang="ky-KG" sz="4400" dirty="0">

--- a/media/resources/files/Onduktar_Akcha_Bingo.pptx
+++ b/media/resources/files/Onduktar_Akcha_Bingo.pptx
@@ -5655,7 +5655,7 @@
             <a:pPr algn="ctr"/>
             <a:r>
               <a:rPr lang="ky-KG" sz="4400" dirty="0"/>
-              <a:t>10642,26 сом</a:t>
+              <a:t>10 642,26 сом</a:t>
             </a:r>
             <a:endParaRPr lang="en-GB" sz="4400" dirty="0"/>
           </a:p>
@@ -10063,7 +10063,7 @@
             <a:pPr algn="ctr"/>
             <a:r>
               <a:rPr lang="en-GB" sz="4400" dirty="0"/>
-              <a:t>41676,8 </a:t>
+              <a:t>41 676,8 </a:t>
             </a:r>
             <a:r>
               <a:rPr lang="ky-KG" sz="4400" dirty="0"/>
@@ -21606,7 +21606,7 @@
                             <a:schemeClr val="tx1"/>
                           </a:solidFill>
                         </a:rPr>
-                        <a:t>10642,26</a:t>
+                        <a:t>10 642,26</a:t>
                       </a:r>
                       <a:endParaRPr kumimoji="0" lang="en-GB" sz="4000" b="0" i="0" u="none" strike="noStrike" kern="1200" cap="none" spc="0" normalizeH="0" baseline="0" noProof="0" dirty="0">
                         <a:ln>
@@ -22537,7 +22537,7 @@
                       </a:pPr>
                       <a:r>
                         <a:rPr lang="en-GB" sz="4000" dirty="0"/>
-                        <a:t>41676,8</a:t>
+                        <a:t>41 676,8</a:t>
                       </a:r>
                       <a:endParaRPr kumimoji="0" lang="en-GB" sz="4000" b="0" i="0" u="none" strike="noStrike" kern="1200" cap="none" spc="0" normalizeH="0" baseline="0" noProof="0" dirty="0">
                         <a:ln>
